--- a/Topic_D/Exam_Practice/TD-L11_Writing_Workshop_Topic_D_Integrated_Communication_Workshop.pptx
+++ b/Topic_D/Exam_Practice/TD-L11_Writing_Workshop_Topic_D_Integrated_Communication_Workshop.pptx
@@ -784,7 +784,11 @@
           <a:lstStyle/>
           <a:p>
             <a:r>
-              <a:rPr lang="en-US" dirty="0"/>
+              <a:rPr lang="ar-SA" dirty="0">
+                <a:latin typeface="Amiri" pitchFamily="2" charset="-78"/>
+                <a:ea typeface="Amiri" pitchFamily="2" charset="-78"/>
+                <a:cs typeface="Amiri" pitchFamily="2" charset="-78"/>
+              </a:rPr>
               <a:t>Q3 (3 min to choose and read). Title (أ) suits Core and Develop; title (ب) suits Stretch.</a:t>
             </a:r>
             <a:endParaRPr lang="en-US" dirty="0"/>
@@ -1403,7 +1407,11 @@
           <a:lstStyle/>
           <a:p>
             <a:r>
-              <a:rPr lang="en-US" dirty="0"/>
+              <a:rPr lang="ar-SA" dirty="0">
+                <a:latin typeface="Amiri" pitchFamily="2" charset="-78"/>
+                <a:ea typeface="Amiri" pitchFamily="2" charset="-78"/>
+                <a:cs typeface="Amiri" pitchFamily="2" charset="-78"/>
+              </a:rPr>
               <a:t>WELCOME (1 min) — while students join.
 • Greet each student by name as they arrive: السَّلَامُ عَلَيْكُمْ. Take the register (Pastoral Tracker: attendance 0/1).
 • 2-MINUTE CHECK-IN (SEND training): a private chat to any student who seemed unsettled last lesson — “Are you okay today? 👍 / 👎”.
@@ -1936,7 +1944,11 @@
           <a:lstStyle/>
           <a:p>
             <a:r>
-              <a:rPr lang="en-US" dirty="0"/>
+              <a:rPr lang="ar-SA" dirty="0">
+                <a:latin typeface="Amiri" pitchFamily="2" charset="-78"/>
+                <a:ea typeface="Amiri" pitchFamily="2" charset="-78"/>
+                <a:cs typeface="Amiri" pitchFamily="2" charset="-78"/>
+              </a:rPr>
               <a:t>Question words: كَيْفَ كَانَتْ (how did … go — PAST) · مَاذَا تَفْعَلُ (what do you do — PRESENT) · خِطَطُكَ (your plans — FUTURE) · اسْأَلْ (ask!).</a:t>
             </a:r>
             <a:endParaRPr lang="en-US" dirty="0"/>
@@ -2508,6 +2520,7 @@
                   <a:srgbClr val="D4AF37"/>
                 </a:solidFill>
                 <a:latin typeface="Amiri" pitchFamily="2" charset="-78"/>
+                <a:ea typeface="Amiri" pitchFamily="2" charset="-78"/>
                 <a:cs typeface="Amiri" pitchFamily="2" charset="-78"/>
               </a:rPr>
               <a:t>م</a:t>
@@ -2714,6 +2727,7 @@
                   <a:srgbClr val="D4AF37"/>
                 </a:solidFill>
                 <a:latin typeface="Amiri" pitchFamily="2" charset="-78"/>
+                <a:ea typeface="Amiri" pitchFamily="2" charset="-78"/>
                 <a:cs typeface="Amiri" pitchFamily="2" charset="-78"/>
               </a:rPr>
               <a:t>وَرْشَةُ الكِتَابَةِ — وَرْشَةُ التَّوَاصُلِ المُتَكَامِلِ</a:t>
@@ -3171,6 +3185,7 @@
                   <a:srgbClr val="D4AF37"/>
                 </a:solidFill>
                 <a:latin typeface="Amiri" pitchFamily="2" charset="-78"/>
+                <a:ea typeface="Amiri" pitchFamily="2" charset="-78"/>
                 <a:cs typeface="Amiri" pitchFamily="2" charset="-78"/>
               </a:rPr>
               <a:t>م</a:t>
@@ -3491,6 +3506,7 @@
                   <a:srgbClr val="8A6D1E"/>
                 </a:solidFill>
                 <a:latin typeface="Amiri" pitchFamily="2" charset="-78"/>
+                <a:ea typeface="Amiri" pitchFamily="2" charset="-78"/>
                 <a:cs typeface="Amiri" pitchFamily="2" charset="-78"/>
               </a:rPr>
               <a:t>نَمُوذَجُ الإِجَابَةِ</a:t>
@@ -3604,6 +3620,7 @@
                   <a:srgbClr val="1F2A37"/>
                 </a:solidFill>
                 <a:latin typeface="Amiri" pitchFamily="2" charset="-78"/>
+                <a:ea typeface="Amiri" pitchFamily="2" charset="-78"/>
                 <a:cs typeface="Amiri" pitchFamily="2" charset="-78"/>
               </a:rPr>
               <a:t>مَرْحَبًا يَا يُوسُفُ،</a:t>
@@ -3623,6 +3640,7 @@
                   <a:srgbClr val="1F2A37"/>
                 </a:solidFill>
                 <a:latin typeface="Amiri" pitchFamily="2" charset="-78"/>
+                <a:ea typeface="Amiri" pitchFamily="2" charset="-78"/>
                 <a:cs typeface="Amiri" pitchFamily="2" charset="-78"/>
               </a:rPr>
               <a:t>كَيْفَ حَالُكَ؟ عِنْدِي أَخْبَارٌ كَثِيرَةٌ! أَوَّلًا، انْتَهَتِ الامْتِحَانَاتُ، وَكَانَتِ الكِيمْيَاءُ أَصْعَبَ مَادَّةٍ. ثُمَّ بَدَأْتُ تَدْرِيبًا فِي صَيْدَلِيَّةِ المُسْتَشْفَى. أَعْمَلُ مِنَ التَّاسِعَةِ إِلَى الثَّالِثَةِ، وَأُسَاعِدُ الصَّيْدَلَانِيَّ فِي تَرْتِيبِ الأَدْوِيَةِ. بِالإِضَافَةِ إِلَى ذٰلِكَ، أَتَعَلَّمُ كَيْفَ أَتَكَلَّمُ مَعَ المَرْضَى. العَمَلُ مُتْعِبٌ، وَمَعَ ذٰلِكَ أُحِبُّهُ كَثِيرًا. لِذٰلِكَ سَأَدْرُسُ الصَّيْدَلَةَ فِي الجَامِعَةِ إِنْ شَاءَ اللّٰهُ. وَأَنْتَ، مَاذَا سَتَفْعَلُ فِي الصَّيْفِ؟</a:t>
@@ -3642,6 +3660,7 @@
                   <a:srgbClr val="1F2A37"/>
                 </a:solidFill>
                 <a:latin typeface="Amiri" pitchFamily="2" charset="-78"/>
+                <a:ea typeface="Amiri" pitchFamily="2" charset="-78"/>
                 <a:cs typeface="Amiri" pitchFamily="2" charset="-78"/>
               </a:rPr>
               <a:t>إِلَى اللِّقَاءِ،</a:t>
@@ -3661,6 +3680,7 @@
                   <a:srgbClr val="1F2A37"/>
                 </a:solidFill>
                 <a:latin typeface="Amiri" pitchFamily="2" charset="-78"/>
+                <a:ea typeface="Amiri" pitchFamily="2" charset="-78"/>
                 <a:cs typeface="Amiri" pitchFamily="2" charset="-78"/>
               </a:rPr>
               <a:t>آدَمُ</a:t>
@@ -3824,11 +3844,12 @@
               <a:buNone/>
             </a:pPr>
             <a:r>
-              <a:rPr lang="en-US" sz="950" b="1" dirty="0">
+              <a:rPr lang="ar-SA" sz="950" b="1" dirty="0">
                 <a:solidFill>
                   <a:srgbClr val="FFFFFF"/>
                 </a:solidFill>
                 <a:latin typeface="Calibri" pitchFamily="34" charset="0"/>
+                <a:ea typeface="Amiri" pitchFamily="2" charset="-78"/>
                 <a:cs typeface="Amiri" pitchFamily="2" charset="-78"/>
               </a:rPr>
               <a:t>أَوَّلًا</a:t>
@@ -3889,11 +3910,12 @@
               <a:buNone/>
             </a:pPr>
             <a:r>
-              <a:rPr lang="en-US" sz="950" b="1" dirty="0">
+              <a:rPr lang="ar-SA" sz="950" b="1" dirty="0">
                 <a:solidFill>
                   <a:srgbClr val="FFFFFF"/>
                 </a:solidFill>
                 <a:latin typeface="Calibri" pitchFamily="34" charset="0"/>
+                <a:ea typeface="Amiri" pitchFamily="2" charset="-78"/>
                 <a:cs typeface="Amiri" pitchFamily="2" charset="-78"/>
               </a:rPr>
               <a:t>بِالإِضَافَةِ إِلَى ذٰلِكَ</a:t>
@@ -3954,11 +3976,12 @@
               <a:buNone/>
             </a:pPr>
             <a:r>
-              <a:rPr lang="en-US" sz="950" b="1" dirty="0">
+              <a:rPr lang="ar-SA" sz="950" b="1" dirty="0">
                 <a:solidFill>
                   <a:srgbClr val="FFFFFF"/>
                 </a:solidFill>
                 <a:latin typeface="Calibri" pitchFamily="34" charset="0"/>
+                <a:ea typeface="Amiri" pitchFamily="2" charset="-78"/>
                 <a:cs typeface="Amiri" pitchFamily="2" charset="-78"/>
               </a:rPr>
               <a:t>وَمَعَ ذٰلِكَ</a:t>
@@ -4019,11 +4042,12 @@
               <a:buNone/>
             </a:pPr>
             <a:r>
-              <a:rPr lang="en-US" sz="950" b="1" dirty="0">
+              <a:rPr lang="ar-SA" sz="950" b="1" dirty="0">
                 <a:solidFill>
                   <a:srgbClr val="FFFFFF"/>
                 </a:solidFill>
                 <a:latin typeface="Calibri" pitchFamily="34" charset="0"/>
+                <a:ea typeface="Amiri" pitchFamily="2" charset="-78"/>
                 <a:cs typeface="Amiri" pitchFamily="2" charset="-78"/>
               </a:rPr>
               <a:t>لِذٰلِكَ سَأَدْرُسُ</a:t>
@@ -4157,6 +4181,7 @@
                   <a:srgbClr val="D4AF37"/>
                 </a:solidFill>
                 <a:latin typeface="Amiri" pitchFamily="2" charset="-78"/>
+                <a:ea typeface="Amiri" pitchFamily="2" charset="-78"/>
                 <a:cs typeface="Amiri" pitchFamily="2" charset="-78"/>
               </a:rPr>
               <a:t>م</a:t>
@@ -4477,6 +4502,7 @@
                   <a:srgbClr val="8A6D1E"/>
                 </a:solidFill>
                 <a:latin typeface="Amiri" pitchFamily="2" charset="-78"/>
+                <a:ea typeface="Amiri" pitchFamily="2" charset="-78"/>
                 <a:cs typeface="Amiri" pitchFamily="2" charset="-78"/>
               </a:rPr>
               <a:t>نَمُوذَجُ الإِجَابَةِ</a:t>
@@ -4590,6 +4616,7 @@
                   <a:srgbClr val="1F2A37"/>
                 </a:solidFill>
                 <a:latin typeface="Amiri" pitchFamily="2" charset="-78"/>
+                <a:ea typeface="Amiri" pitchFamily="2" charset="-78"/>
                 <a:cs typeface="Amiri" pitchFamily="2" charset="-78"/>
               </a:rPr>
               <a:t>عَزِيزِي يُوسُفُ،</a:t>
@@ -4609,6 +4636,7 @@
                   <a:srgbClr val="1F2A37"/>
                 </a:solidFill>
                 <a:latin typeface="Amiri" pitchFamily="2" charset="-78"/>
+                <a:ea typeface="Amiri" pitchFamily="2" charset="-78"/>
                 <a:cs typeface="Amiri" pitchFamily="2" charset="-78"/>
               </a:rPr>
               <a:t>انْتَهَى أَخِيرًا مَوْسِمُ الامْتِحَانَاتِ، وَكَانَتِ الكِيمْيَاءُ أَصْعَبَهَا كَمَا تَوَقَّعْتُ، غَيْرَ أَنَّ المُرَاجَعَةَ المُنَظَّمَةَ أَنْقَذَتْنِي. وَبَدَأْتُ هٰذَا الأُسْبُوعَ تَدْرِيبًا صَيْفِيًّا فِي صَيْدَلِيَّةِ المُسْتَشْفَى، حَيْثُ أُسَاعِدُ الصَّيْدَلَانِيَّةَ فِي تَرْتِيبِ الأَدْوِيَةِ وَتَسْجِيلِهَا، وَأُرَاقِبُ كَيْفَ تَشْرَحُ لِلْمَرْضَى طَرِيقَةَ اسْتِعْمَالِهَا بِلُطْفٍ وَصَبْرٍ. صَحِيحٌ أَنَّ سَاعَاتِ العَمَلِ طَوِيلَةٌ، وَأَنَّنِي أَعُودُ إِلَى البَيْتِ مُتْعَبًا، إِلَّا أَنَّ هٰذِهِ التَّجْرِبَةَ أَكَّدَتْ لِي أَنَّ الصَّيْدَلَةَ هِيَ الطَّرِيقُ الَّذِي أُرِيدُهُ. لِذٰلِكَ سَأَتَقَدَّمُ لِكُلِّيَّاتِ الصَّيْدَلَةِ فِي الخَرِيفِ، وَإِذَا لَمْ أُقْبَلْ، فَسَأَدْرُسُ الكِيمْيَاءَ أَوَّلًا. وَأَنْتَ، كَيْفَ تَقْضِي صَيْفَكَ؟ هَلْ وَجَدْتَ عَمَلًا؟</a:t>
@@ -4628,6 +4656,7 @@
                   <a:srgbClr val="1F2A37"/>
                 </a:solidFill>
                 <a:latin typeface="Amiri" pitchFamily="2" charset="-78"/>
+                <a:ea typeface="Amiri" pitchFamily="2" charset="-78"/>
                 <a:cs typeface="Amiri" pitchFamily="2" charset="-78"/>
               </a:rPr>
               <a:t>مَعَ تَحِيَّاتِي،</a:t>
@@ -4647,6 +4676,7 @@
                   <a:srgbClr val="1F2A37"/>
                 </a:solidFill>
                 <a:latin typeface="Amiri" pitchFamily="2" charset="-78"/>
+                <a:ea typeface="Amiri" pitchFamily="2" charset="-78"/>
                 <a:cs typeface="Amiri" pitchFamily="2" charset="-78"/>
               </a:rPr>
               <a:t>آدَمُ</a:t>
@@ -4810,11 +4840,12 @@
               <a:buNone/>
             </a:pPr>
             <a:r>
-              <a:rPr lang="en-US" sz="950" b="1" dirty="0">
+              <a:rPr lang="ar-SA" sz="950" b="1" dirty="0">
                 <a:solidFill>
                   <a:srgbClr val="FFFFFF"/>
                 </a:solidFill>
                 <a:latin typeface="Calibri" pitchFamily="34" charset="0"/>
+                <a:ea typeface="Amiri" pitchFamily="2" charset="-78"/>
                 <a:cs typeface="Amiri" pitchFamily="2" charset="-78"/>
               </a:rPr>
               <a:t>غَيْرَ أَنَّ</a:t>
@@ -4875,11 +4906,12 @@
               <a:buNone/>
             </a:pPr>
             <a:r>
-              <a:rPr lang="en-US" sz="950" b="1" dirty="0">
+              <a:rPr lang="ar-SA" sz="950" b="1" dirty="0">
                 <a:solidFill>
                   <a:srgbClr val="FFFFFF"/>
                 </a:solidFill>
                 <a:latin typeface="Calibri" pitchFamily="34" charset="0"/>
+                <a:ea typeface="Amiri" pitchFamily="2" charset="-78"/>
                 <a:cs typeface="Amiri" pitchFamily="2" charset="-78"/>
               </a:rPr>
               <a:t>حَيْثُ أُسَاعِدُ</a:t>
@@ -4940,11 +4972,12 @@
               <a:buNone/>
             </a:pPr>
             <a:r>
-              <a:rPr lang="en-US" sz="950" b="1" dirty="0">
+              <a:rPr lang="ar-SA" sz="950" b="1" dirty="0">
                 <a:solidFill>
                   <a:srgbClr val="FFFFFF"/>
                 </a:solidFill>
                 <a:latin typeface="Calibri" pitchFamily="34" charset="0"/>
+                <a:ea typeface="Amiri" pitchFamily="2" charset="-78"/>
                 <a:cs typeface="Amiri" pitchFamily="2" charset="-78"/>
               </a:rPr>
               <a:t>صَحِيحٌ أَنَّ … إِلَّا أَنَّ</a:t>
@@ -5005,11 +5038,12 @@
               <a:buNone/>
             </a:pPr>
             <a:r>
-              <a:rPr lang="en-US" sz="950" b="1" dirty="0">
+              <a:rPr lang="ar-SA" sz="950" b="1" dirty="0">
                 <a:solidFill>
                   <a:srgbClr val="FFFFFF"/>
                 </a:solidFill>
                 <a:latin typeface="Calibri" pitchFamily="34" charset="0"/>
+                <a:ea typeface="Amiri" pitchFamily="2" charset="-78"/>
                 <a:cs typeface="Amiri" pitchFamily="2" charset="-78"/>
               </a:rPr>
               <a:t>إِذَا لَمْ أُقْبَلْ</a:t>
@@ -5143,6 +5177,7 @@
                   <a:srgbClr val="D4AF37"/>
                 </a:solidFill>
                 <a:latin typeface="Amiri" pitchFamily="2" charset="-78"/>
+                <a:ea typeface="Amiri" pitchFamily="2" charset="-78"/>
                 <a:cs typeface="Amiri" pitchFamily="2" charset="-78"/>
               </a:rPr>
               <a:t>م</a:t>
@@ -5463,6 +5498,7 @@
                   <a:srgbClr val="8A6D1E"/>
                 </a:solidFill>
                 <a:latin typeface="Amiri" pitchFamily="2" charset="-78"/>
+                <a:ea typeface="Amiri" pitchFamily="2" charset="-78"/>
                 <a:cs typeface="Amiri" pitchFamily="2" charset="-78"/>
               </a:rPr>
               <a:t>اخْتَرْ عُنْوَانًا وَاحِدًا</a:t>
@@ -5743,6 +5779,7 @@
                   <a:srgbClr val="1B3B6F"/>
                 </a:solidFill>
                 <a:latin typeface="Amiri" pitchFamily="2" charset="-78"/>
+                <a:ea typeface="Amiri" pitchFamily="2" charset="-78"/>
                 <a:cs typeface="Amiri" pitchFamily="2" charset="-78"/>
               </a:rPr>
               <a:t>مِنَ المَدْرَسَةِ إِلَى مِهْنَةِ المُسْتَقْبَلِ</a:t>
@@ -5781,6 +5818,7 @@
                   <a:srgbClr val="1B3B6F"/>
                 </a:solidFill>
                 <a:latin typeface="Amiri" pitchFamily="2" charset="-78"/>
+                <a:ea typeface="Amiri" pitchFamily="2" charset="-78"/>
                 <a:cs typeface="Amiri" pitchFamily="2" charset="-78"/>
               </a:rPr>
               <a:t>(أ)</a:t>
@@ -5887,6 +5925,7 @@
                   <a:srgbClr val="1B3B6F"/>
                 </a:solidFill>
                 <a:latin typeface="Amiri" pitchFamily="2" charset="-78"/>
+                <a:ea typeface="Amiri" pitchFamily="2" charset="-78"/>
                 <a:cs typeface="Amiri" pitchFamily="2" charset="-78"/>
               </a:rPr>
               <a:t>دِرَاسَتُكَ الآنَ وَفِي المَاضِي · المَهَارَاتُ وَالشَّهَادَاتُ · تَجْرِبَةُ عَمَلٍ أَوْ تَطَوُّعٍ · طُمُوحَاتُكَ وَخُطَّتُكَ البَدِيلَةُ</a:t>
@@ -6018,6 +6057,7 @@
                   <a:srgbClr val="1B3B6F"/>
                 </a:solidFill>
                 <a:latin typeface="Amiri" pitchFamily="2" charset="-78"/>
+                <a:ea typeface="Amiri" pitchFamily="2" charset="-78"/>
                 <a:cs typeface="Amiri" pitchFamily="2" charset="-78"/>
               </a:rPr>
               <a:t>هَلْ تُعِدُّنَا المَدْرَسَةُ لِعَالَمِ العَمَلِ؟</a:t>
@@ -6056,6 +6096,7 @@
                   <a:srgbClr val="1B3B6F"/>
                 </a:solidFill>
                 <a:latin typeface="Amiri" pitchFamily="2" charset="-78"/>
+                <a:ea typeface="Amiri" pitchFamily="2" charset="-78"/>
                 <a:cs typeface="Amiri" pitchFamily="2" charset="-78"/>
               </a:rPr>
               <a:t>(ب)</a:t>
@@ -6162,6 +6203,7 @@
                   <a:srgbClr val="1B3B6F"/>
                 </a:solidFill>
                 <a:latin typeface="Amiri" pitchFamily="2" charset="-78"/>
+                <a:ea typeface="Amiri" pitchFamily="2" charset="-78"/>
                 <a:cs typeface="Amiri" pitchFamily="2" charset="-78"/>
               </a:rPr>
               <a:t>المُشْكِلَةُ · مَا تُقَدِّمُهُ المَدْرَسَةُ وَمَا يَنْقُصُهَا · مِثَالٌ مِنْ تَجْرِبَتِكَ · رَأْيُكَ وَاقْتِرَاحُكَ</a:t>
@@ -6361,6 +6403,7 @@
                   <a:srgbClr val="D4AF37"/>
                 </a:solidFill>
                 <a:latin typeface="Amiri" pitchFamily="2" charset="-78"/>
+                <a:ea typeface="Amiri" pitchFamily="2" charset="-78"/>
                 <a:cs typeface="Amiri" pitchFamily="2" charset="-78"/>
               </a:rPr>
               <a:t>م</a:t>
@@ -6681,6 +6724,7 @@
                   <a:srgbClr val="8A6D1E"/>
                 </a:solidFill>
                 <a:latin typeface="Amiri" pitchFamily="2" charset="-78"/>
+                <a:ea typeface="Amiri" pitchFamily="2" charset="-78"/>
                 <a:cs typeface="Amiri" pitchFamily="2" charset="-78"/>
               </a:rPr>
               <a:t>خُطَّةُ الكِتَابَةِ</a:t>
@@ -7305,6 +7349,7 @@
                   <a:srgbClr val="1B3B6F"/>
                 </a:solidFill>
                 <a:latin typeface="Amiri" pitchFamily="2" charset="-78"/>
+                <a:ea typeface="Amiri" pitchFamily="2" charset="-78"/>
                 <a:cs typeface="Amiri" pitchFamily="2" charset="-78"/>
               </a:rPr>
               <a:t>أَدْرُسُ الكِيمْيَاءَ، وَأُرَاجِعُ كُلَّ يَوْمٍ سَاعَتَيْنِ.</a:t>
@@ -7404,6 +7449,7 @@
                   <a:srgbClr val="1B3B6F"/>
                 </a:solidFill>
                 <a:latin typeface="Amiri" pitchFamily="2" charset="-78"/>
+                <a:ea typeface="Amiri" pitchFamily="2" charset="-78"/>
                 <a:cs typeface="Amiri" pitchFamily="2" charset="-78"/>
               </a:rPr>
               <a:t>عَمِلْتُ فِي صَيْدَلِيَّةٍ، وَكَانَ العَمَلُ مُتْعِبًا، وَمَعَ ذٰلِكَ كَانَ مُمْتِعًا.</a:t>
@@ -7503,6 +7549,7 @@
                   <a:srgbClr val="1B3B6F"/>
                 </a:solidFill>
                 <a:latin typeface="Amiri" pitchFamily="2" charset="-78"/>
+                <a:ea typeface="Amiri" pitchFamily="2" charset="-78"/>
                 <a:cs typeface="Amiri" pitchFamily="2" charset="-78"/>
               </a:rPr>
               <a:t>لِذٰلِكَ أَطْمَحُ إِلَى أَنْ أُصْبِحَ صَيْدَلَانِيًّا.</a:t>
@@ -7664,6 +7711,7 @@
                   <a:srgbClr val="1F2A37"/>
                 </a:solidFill>
                 <a:latin typeface="Amiri" pitchFamily="2" charset="-78"/>
+                <a:ea typeface="Amiri" pitchFamily="2" charset="-78"/>
                 <a:cs typeface="Amiri" pitchFamily="2" charset="-78"/>
               </a:rPr>
               <a:t>أ</a:t>
@@ -7690,6 +7738,7 @@
                   <a:srgbClr val="1F2A37"/>
                 </a:solidFill>
                 <a:latin typeface="Amiri" pitchFamily="2" charset="-78"/>
+                <a:ea typeface="Amiri" pitchFamily="2" charset="-78"/>
                 <a:cs typeface="Amiri" pitchFamily="2" charset="-78"/>
               </a:rPr>
               <a:t>ب</a:t>
@@ -7836,6 +7885,7 @@
                   <a:srgbClr val="D4AF37"/>
                 </a:solidFill>
                 <a:latin typeface="Amiri" pitchFamily="2" charset="-78"/>
+                <a:ea typeface="Amiri" pitchFamily="2" charset="-78"/>
                 <a:cs typeface="Amiri" pitchFamily="2" charset="-78"/>
               </a:rPr>
               <a:t>م</a:t>
@@ -8093,6 +8143,7 @@
                   <a:srgbClr val="8A6D1E"/>
                 </a:solidFill>
                 <a:latin typeface="Amiri" pitchFamily="2" charset="-78"/>
+                <a:ea typeface="Amiri" pitchFamily="2" charset="-78"/>
                 <a:cs typeface="Amiri" pitchFamily="2" charset="-78"/>
               </a:rPr>
               <a:t>أ</a:t>
@@ -8157,6 +8208,7 @@
                   <a:srgbClr val="1B3B6F"/>
                 </a:solidFill>
                 <a:latin typeface="Amiri" pitchFamily="2" charset="-78"/>
+                <a:ea typeface="Amiri" pitchFamily="2" charset="-78"/>
                 <a:cs typeface="Amiri" pitchFamily="2" charset="-78"/>
               </a:rPr>
               <a:t>أ</a:t>
@@ -8208,6 +8260,7 @@
                   <a:srgbClr val="8A6D1E"/>
                 </a:solidFill>
                 <a:latin typeface="Amiri" pitchFamily="2" charset="-78"/>
+                <a:ea typeface="Amiri" pitchFamily="2" charset="-78"/>
                 <a:cs typeface="Amiri" pitchFamily="2" charset="-78"/>
               </a:rPr>
               <a:t>نَمُوذَجُ الإِجَابَةِ</a:t>
@@ -8321,6 +8374,7 @@
                   <a:srgbClr val="1F2A37"/>
                 </a:solidFill>
                 <a:latin typeface="Amiri" pitchFamily="2" charset="-78"/>
+                <a:ea typeface="Amiri" pitchFamily="2" charset="-78"/>
                 <a:cs typeface="Amiri" pitchFamily="2" charset="-78"/>
               </a:rPr>
               <a:t>أَوَّلًا، أَنَا الآنَ فِي الصَّفِّ الثَّانِي عَشَرَ، وَأَدْرُسُ الكِيمْيَاءَ وَالأَحْيَاءَ وَالرِّيَاضِيَّاتِ. أُرَاجِعُ كُلَّ يَوْمٍ سَاعَتَيْنِ فِي مَكْتَبَةِ المَدْرَسَةِ بَعْدَ الدُّرُوسِ، لِأَنَّ الامْتِحَانَاتِ مُهِمَّةٌ جِدًّا. فِي المَدْرَسَةِ الابْتِدَائِيَّةِ كُنْتُ أُحِبُّ العُلُومَ، وَكُنْتُ أَعْمَلُ تَجَارِبَ صَغِيرَةً فِي البَيْتِ.</a:t>
@@ -8340,6 +8394,7 @@
                   <a:srgbClr val="1F2A37"/>
                 </a:solidFill>
                 <a:latin typeface="Amiri" pitchFamily="2" charset="-78"/>
+                <a:ea typeface="Amiri" pitchFamily="2" charset="-78"/>
                 <a:cs typeface="Amiri" pitchFamily="2" charset="-78"/>
               </a:rPr>
               <a:t>بِالإِضَافَةِ إِلَى ذٰلِكَ، أَتَطَوَّعُ فِي دَارٍ لِلْمُسِنِّينَ كُلَّ يَوْمِ سَبْتٍ. هُنَاكَ تَعَلَّمْتُ الصَّبْرَ وَالاسْتِمَاعَ. حَصَلْتُ أَيْضًا عَلَى شَهَادَةٍ فِي الإِسْعَافَاتِ الأَوَّلِيَّةِ مِنَ الهِلَالِ الأَحْمَرِ.</a:t>
@@ -8359,6 +8414,7 @@
                   <a:srgbClr val="1F2A37"/>
                 </a:solidFill>
                 <a:latin typeface="Amiri" pitchFamily="2" charset="-78"/>
+                <a:ea typeface="Amiri" pitchFamily="2" charset="-78"/>
                 <a:cs typeface="Amiri" pitchFamily="2" charset="-78"/>
               </a:rPr>
               <a:t>فِي الصَّيْفِ المَاضِي عَمِلْتُ فِي صَيْدَلِيَّةِ الحَيِّ أُسْبُوعَيْنِ. كُنْتُ أُرَتِّبُ الأَدْوِيَةَ، وَأُسَاعِدُ الزَّبَائِنَ، وَتَعَلَّمْتُ أَنَّ العَمَلَ مَعَ النَّاسِ يَحْتَاجُ إِلَى الصَّبْرِ وَالابْتِسَامَةِ. كَانَ العَمَلُ مُتْعِبًا، وَمَعَ ذٰلِكَ كَانَ مُمْتِعًا جِدًّا.</a:t>
@@ -8378,6 +8434,7 @@
                   <a:srgbClr val="1F2A37"/>
                 </a:solidFill>
                 <a:latin typeface="Amiri" pitchFamily="2" charset="-78"/>
+                <a:ea typeface="Amiri" pitchFamily="2" charset="-78"/>
                 <a:cs typeface="Amiri" pitchFamily="2" charset="-78"/>
               </a:rPr>
               <a:t>لِذٰلِكَ أَطْمَحُ إِلَى أَنْ أُصْبِحَ صَيْدَلَانِيًّا. سَأَتَقَدَّمُ لِلْجَامِعَةِ فِي الخَرِيفِ، وَإِذَا لَمْ أُقْبَلْ فِي الصَّيْدَلَةِ، فَسَأَدْرُسُ الكِيمْيَاءَ أَوَّلًا، ثُمَّ أُحَاوِلُ مِنْ جَدِيدٍ. لَنْ أَتْرُكَ حُلْمِي.</a:t>
@@ -8541,11 +8598,12 @@
               <a:buNone/>
             </a:pPr>
             <a:r>
-              <a:rPr lang="en-US" sz="950" b="1" dirty="0">
+              <a:rPr lang="ar-SA" sz="950" b="1" dirty="0">
                 <a:solidFill>
                   <a:srgbClr val="FFFFFF"/>
                 </a:solidFill>
                 <a:latin typeface="Calibri" pitchFamily="34" charset="0"/>
+                <a:ea typeface="Amiri" pitchFamily="2" charset="-78"/>
                 <a:cs typeface="Amiri" pitchFamily="2" charset="-78"/>
               </a:rPr>
               <a:t>أَوَّلًا</a:t>
@@ -8606,11 +8664,12 @@
               <a:buNone/>
             </a:pPr>
             <a:r>
-              <a:rPr lang="en-US" sz="950" b="1" dirty="0">
+              <a:rPr lang="ar-SA" sz="950" b="1" dirty="0">
                 <a:solidFill>
                   <a:srgbClr val="FFFFFF"/>
                 </a:solidFill>
                 <a:latin typeface="Calibri" pitchFamily="34" charset="0"/>
+                <a:ea typeface="Amiri" pitchFamily="2" charset="-78"/>
                 <a:cs typeface="Amiri" pitchFamily="2" charset="-78"/>
               </a:rPr>
               <a:t>بِالإِضَافَةِ إِلَى ذٰلِكَ</a:t>
@@ -8671,11 +8730,12 @@
               <a:buNone/>
             </a:pPr>
             <a:r>
-              <a:rPr lang="en-US" sz="950" b="1" dirty="0">
+              <a:rPr lang="ar-SA" sz="950" b="1" dirty="0">
                 <a:solidFill>
                   <a:srgbClr val="FFFFFF"/>
                 </a:solidFill>
                 <a:latin typeface="Calibri" pitchFamily="34" charset="0"/>
+                <a:ea typeface="Amiri" pitchFamily="2" charset="-78"/>
                 <a:cs typeface="Amiri" pitchFamily="2" charset="-78"/>
               </a:rPr>
               <a:t>وَمَعَ ذٰلِكَ</a:t>
@@ -8736,11 +8796,12 @@
               <a:buNone/>
             </a:pPr>
             <a:r>
-              <a:rPr lang="en-US" sz="950" b="1" dirty="0">
+              <a:rPr lang="ar-SA" sz="950" b="1" dirty="0">
                 <a:solidFill>
                   <a:srgbClr val="FFFFFF"/>
                 </a:solidFill>
                 <a:latin typeface="Calibri" pitchFamily="34" charset="0"/>
+                <a:ea typeface="Amiri" pitchFamily="2" charset="-78"/>
                 <a:cs typeface="Amiri" pitchFamily="2" charset="-78"/>
               </a:rPr>
               <a:t>لِذٰلِكَ أَطْمَحُ</a:t>
@@ -8874,6 +8935,7 @@
                   <a:srgbClr val="D4AF37"/>
                 </a:solidFill>
                 <a:latin typeface="Amiri" pitchFamily="2" charset="-78"/>
+                <a:ea typeface="Amiri" pitchFamily="2" charset="-78"/>
                 <a:cs typeface="Amiri" pitchFamily="2" charset="-78"/>
               </a:rPr>
               <a:t>م</a:t>
@@ -9131,6 +9193,7 @@
                   <a:srgbClr val="8A6D1E"/>
                 </a:solidFill>
                 <a:latin typeface="Amiri" pitchFamily="2" charset="-78"/>
+                <a:ea typeface="Amiri" pitchFamily="2" charset="-78"/>
                 <a:cs typeface="Amiri" pitchFamily="2" charset="-78"/>
               </a:rPr>
               <a:t>أ</a:t>
@@ -9195,6 +9258,7 @@
                   <a:srgbClr val="1B3B6F"/>
                 </a:solidFill>
                 <a:latin typeface="Amiri" pitchFamily="2" charset="-78"/>
+                <a:ea typeface="Amiri" pitchFamily="2" charset="-78"/>
                 <a:cs typeface="Amiri" pitchFamily="2" charset="-78"/>
               </a:rPr>
               <a:t>أ</a:t>
@@ -9246,6 +9310,7 @@
                   <a:srgbClr val="8A6D1E"/>
                 </a:solidFill>
                 <a:latin typeface="Amiri" pitchFamily="2" charset="-78"/>
+                <a:ea typeface="Amiri" pitchFamily="2" charset="-78"/>
                 <a:cs typeface="Amiri" pitchFamily="2" charset="-78"/>
               </a:rPr>
               <a:t>نَمُوذَجُ الإِجَابَةِ</a:t>
@@ -9359,6 +9424,7 @@
                   <a:srgbClr val="1F2A37"/>
                 </a:solidFill>
                 <a:latin typeface="Amiri" pitchFamily="2" charset="-78"/>
+                <a:ea typeface="Amiri" pitchFamily="2" charset="-78"/>
                 <a:cs typeface="Amiri" pitchFamily="2" charset="-78"/>
               </a:rPr>
               <a:t>حِينَ أَنْظُرُ إِلَى الوَرَاءِ، أَرَى أَنَّ رِحْلَتِي نَحْوَ مِهْنَةِ المُسْتَقْبَلِ لَمْ تَبْدَأْ فِي مَكْتَبِ الإِرْشَادِ المِهْنِيِّ، بَلْ فِي مَطْبَخِ بَيْتِنَا، حَيْثُ كُنْتُ أَخْلِطُ المَوَادَّ وَأَنَا فِي الثَّامِنَةِ، مُقْتَنِعًا بِأَنَّنِي عَالِمٌ كَبِيرٌ!</a:t>
@@ -9378,6 +9444,7 @@
                   <a:srgbClr val="1F2A37"/>
                 </a:solidFill>
                 <a:latin typeface="Amiri" pitchFamily="2" charset="-78"/>
+                <a:ea typeface="Amiri" pitchFamily="2" charset="-78"/>
                 <a:cs typeface="Amiri" pitchFamily="2" charset="-78"/>
               </a:rPr>
               <a:t>وَمَعَ مُرُورِ السَّنَوَاتِ، تَحَوَّلَ ذٰلِكَ الفُضُولُ إِلَى شَغَفٍ حَقِيقِيٍّ وَعَمِيقٍ بِالكِيمْيَاءِ، فَاخْتَرْتُهَا مَعَ الأَحْيَاءِ وَالرِّيَاضِيَّاتِ لِلْمَرْحَلَةِ الثَّانَوِيَّةِ. وَمَعَ أَنَّهَا أَصْعَبُ مَوَادِّي، فَإِنَّ تَنْظِيمَ المُرَاجَعَةِ وَحَلَّ الامْتِحَانَاتِ السَّابِقَةِ جَعَلَانِي أَتَفَوَّقُ فِيهَا.</a:t>
@@ -9397,6 +9464,7 @@
                   <a:srgbClr val="1F2A37"/>
                 </a:solidFill>
                 <a:latin typeface="Amiri" pitchFamily="2" charset="-78"/>
+                <a:ea typeface="Amiri" pitchFamily="2" charset="-78"/>
                 <a:cs typeface="Amiri" pitchFamily="2" charset="-78"/>
               </a:rPr>
               <a:t>غَيْرَ أَنَّ الكُتُبَ وَحْدَهَا لَمْ تَكُنْ كَافِيَةً؛ فَقَدْ تَطَوَّعْتُ فِي دَارٍ لِلْمُسِنِّينَ، وَتَدَرَّبْتُ خِلَالَ العُطْلَةِ أُسْبُوعَيْنِ فِي صَيْدَلِيَّةِ المُسْتَشْفَى، فَاكْتَشَفْتُ أَنَّ الصَّيْدَلَانِيَّ لَيْسَ عَالِمًا فِي مُخْتَبَرٍ فَحَسْبُ، بَلْ هُوَ أَيْضًا شَخْصٌ يَسْتَمِعُ وَيُطَمْئِنُ.</a:t>
@@ -9416,6 +9484,7 @@
                   <a:srgbClr val="1F2A37"/>
                 </a:solidFill>
                 <a:latin typeface="Amiri" pitchFamily="2" charset="-78"/>
+                <a:ea typeface="Amiri" pitchFamily="2" charset="-78"/>
                 <a:cs typeface="Amiri" pitchFamily="2" charset="-78"/>
               </a:rPr>
               <a:t>لِذٰلِكَ أَطْمَحُ إِلَى دِرَاسَةِ الصَّيْدَلَةِ، ثُمَّ العَمَلِ فِي مُسْتَشْفًى لِلْأَطْفَالِ، حَيْثُ يَحْتَاجُ الصِّغَارُ وَأَهْلُهُمْ إِلَى كَلِمَةٍ طَيِّبَةٍ. صَحِيحٌ أَنَّ الطَّرِيقَ طَوِيلٌ، غَيْرَ أَنَّ لِي خُطَّةً بَدِيلَةً إِذَا لَمْ أُقْبَلْ. وَلَوْ رَآنِي ذٰلِكَ الطِّفْلُ الصَّغِيرُ فِي المَطْبَخِ اليَوْمَ، لَابْتَسَمَ فَخُورًا.</a:t>
@@ -9514,11 +9583,12 @@
               <a:buNone/>
             </a:pPr>
             <a:r>
-              <a:rPr lang="en-US" sz="950" b="1" dirty="0">
+              <a:rPr lang="ar-SA" sz="950" b="1" dirty="0">
                 <a:solidFill>
                   <a:srgbClr val="FFFFFF"/>
                 </a:solidFill>
                 <a:latin typeface="Calibri" pitchFamily="34" charset="0"/>
+                <a:ea typeface="Amiri" pitchFamily="2" charset="-78"/>
                 <a:cs typeface="Amiri" pitchFamily="2" charset="-78"/>
               </a:rPr>
               <a:t>لَمْ تَبْدَأْ … بَلْ</a:t>
@@ -9579,11 +9649,12 @@
               <a:buNone/>
             </a:pPr>
             <a:r>
-              <a:rPr lang="en-US" sz="950" b="1" dirty="0">
+              <a:rPr lang="ar-SA" sz="950" b="1" dirty="0">
                 <a:solidFill>
                   <a:srgbClr val="FFFFFF"/>
                 </a:solidFill>
                 <a:latin typeface="Calibri" pitchFamily="34" charset="0"/>
+                <a:ea typeface="Amiri" pitchFamily="2" charset="-78"/>
                 <a:cs typeface="Amiri" pitchFamily="2" charset="-78"/>
               </a:rPr>
               <a:t>مَعَ أَنَّهَا … فَإِنَّ</a:t>
@@ -9644,11 +9715,12 @@
               <a:buNone/>
             </a:pPr>
             <a:r>
-              <a:rPr lang="en-US" sz="950" b="1" dirty="0">
+              <a:rPr lang="ar-SA" sz="950" b="1" dirty="0">
                 <a:solidFill>
                   <a:srgbClr val="FFFFFF"/>
                 </a:solidFill>
                 <a:latin typeface="Calibri" pitchFamily="34" charset="0"/>
+                <a:ea typeface="Amiri" pitchFamily="2" charset="-78"/>
                 <a:cs typeface="Amiri" pitchFamily="2" charset="-78"/>
               </a:rPr>
               <a:t>لَيْسَ … فَحَسْبُ، بَلْ</a:t>
@@ -9709,11 +9781,12 @@
               <a:buNone/>
             </a:pPr>
             <a:r>
-              <a:rPr lang="en-US" sz="950" b="1" dirty="0">
+              <a:rPr lang="ar-SA" sz="950" b="1" dirty="0">
                 <a:solidFill>
                   <a:srgbClr val="FFFFFF"/>
                 </a:solidFill>
                 <a:latin typeface="Calibri" pitchFamily="34" charset="0"/>
+                <a:ea typeface="Amiri" pitchFamily="2" charset="-78"/>
                 <a:cs typeface="Amiri" pitchFamily="2" charset="-78"/>
               </a:rPr>
               <a:t>لَوْ رَآنِي … لَابْتَسَمَ</a:t>
@@ -9847,6 +9920,7 @@
                   <a:srgbClr val="D4AF37"/>
                 </a:solidFill>
                 <a:latin typeface="Amiri" pitchFamily="2" charset="-78"/>
+                <a:ea typeface="Amiri" pitchFamily="2" charset="-78"/>
                 <a:cs typeface="Amiri" pitchFamily="2" charset="-78"/>
               </a:rPr>
               <a:t>م</a:t>
@@ -10104,6 +10178,7 @@
                   <a:srgbClr val="8A6D1E"/>
                 </a:solidFill>
                 <a:latin typeface="Amiri" pitchFamily="2" charset="-78"/>
+                <a:ea typeface="Amiri" pitchFamily="2" charset="-78"/>
                 <a:cs typeface="Amiri" pitchFamily="2" charset="-78"/>
               </a:rPr>
               <a:t>ب</a:t>
@@ -10168,6 +10243,7 @@
                   <a:srgbClr val="1B3B6F"/>
                 </a:solidFill>
                 <a:latin typeface="Amiri" pitchFamily="2" charset="-78"/>
+                <a:ea typeface="Amiri" pitchFamily="2" charset="-78"/>
                 <a:cs typeface="Amiri" pitchFamily="2" charset="-78"/>
               </a:rPr>
               <a:t>ب</a:t>
@@ -10219,6 +10295,7 @@
                   <a:srgbClr val="8A6D1E"/>
                 </a:solidFill>
                 <a:latin typeface="Amiri" pitchFamily="2" charset="-78"/>
+                <a:ea typeface="Amiri" pitchFamily="2" charset="-78"/>
                 <a:cs typeface="Amiri" pitchFamily="2" charset="-78"/>
               </a:rPr>
               <a:t>نَمُوذَجُ الإِجَابَةِ</a:t>
@@ -10332,6 +10409,7 @@
                   <a:srgbClr val="1F2A37"/>
                 </a:solidFill>
                 <a:latin typeface="Amiri" pitchFamily="2" charset="-78"/>
+                <a:ea typeface="Amiri" pitchFamily="2" charset="-78"/>
                 <a:cs typeface="Amiri" pitchFamily="2" charset="-78"/>
               </a:rPr>
               <a:t>يَقْضِي الطَّالِبُ نَحْوَ ثَلَاثَ عَشْرَةَ سَنَةً فِي المَدْرَسَةِ، ثُمَّ يُطْلَبُ مِنْهُ فَجْأَةً أَنْ يَكْتُبَ سِيرَةً ذَاتِيَّةً، وَأَنْ يَنْجَحَ فِي مُقَابَلَةٍ، وَأَنْ يَخْتَارَ مِهْنَةً لِبَقِيَّةِ حَيَاتِهِ. فَهَلْ تُعِدُّهُ المَدْرَسَةُ حَقًّا لِهٰذِهِ اللَّحْظَةِ؟</a:t>
@@ -10351,6 +10429,7 @@
                   <a:srgbClr val="1F2A37"/>
                 </a:solidFill>
                 <a:latin typeface="Amiri" pitchFamily="2" charset="-78"/>
+                <a:ea typeface="Amiri" pitchFamily="2" charset="-78"/>
                 <a:cs typeface="Amiri" pitchFamily="2" charset="-78"/>
               </a:rPr>
               <a:t>مِنْ نَاحِيَةٍ، تُقَدِّمُ المَدْرَسَةُ أَسَاسًا لَا غِنَى عَنْهُ مِنَ المَعْرِفَةِ، وَتُعَلِّمُ الانْضِبَاطَ وَتَنْظِيمَ الوَقْتِ. وَمِنْ نَاحِيَةٍ أُخْرَى، نَادِرًا مَا تُعَلِّمُ المَهَارَاتِ العَمَلِيَّةَ، كَالتَّوَاصُلِ المِهْنِيِّ وَإِدَارَةِ المَالِ، مِمَّا يَجْعَلُ الانْتِقَالَ إِلَى العَمَلِ صَدْمَةً لِكَثِيرِينَ، فَيَشْعُرُونَ بِأَنَّهُمْ غَيْرُ مُسْتَعِدِّينَ رَغْمَ شَهَادَاتِهِمُ العَالِيَةِ.</a:t>
@@ -10370,6 +10449,7 @@
                   <a:srgbClr val="1F2A37"/>
                 </a:solidFill>
                 <a:latin typeface="Amiri" pitchFamily="2" charset="-78"/>
+                <a:ea typeface="Amiri" pitchFamily="2" charset="-78"/>
                 <a:cs typeface="Amiri" pitchFamily="2" charset="-78"/>
               </a:rPr>
               <a:t>وَقَدْ رَأَيْتُ الفَرْقَ فِي مَدْرَسَتِي عِنْدَمَا نَظَّمَتْ "أُسْبُوعَ المِهَنِ" لِأَوَّلِ مَرَّةٍ؛ فَتَدَرَّبْنَا عَلَى المُقَابَلَاتِ مَعَ مُوَظَّفِينَ حَقِيقِيِّينَ، وَكَتَبْنَا سِيَرَنَا الذَّاتِيَّةَ بِمُسَاعَدَةِ خُبَرَاءَ، فَحَصَلَ نِصْفُ صَفِّي عَلَى تَدْرِيبٍ صَيْفِيٍّ، وَأَنَا مِنْهُمْ.</a:t>
@@ -10389,6 +10469,7 @@
                   <a:srgbClr val="1F2A37"/>
                 </a:solidFill>
                 <a:latin typeface="Amiri" pitchFamily="2" charset="-78"/>
+                <a:ea typeface="Amiri" pitchFamily="2" charset="-78"/>
                 <a:cs typeface="Amiri" pitchFamily="2" charset="-78"/>
               </a:rPr>
               <a:t>صَحِيحٌ أَنَّ المَدْرَسَةَ لَا تَسْتَطِيعُ أَنْ تُعَلِّمَ كُلَّ شَيْءٍ، غَيْرَ أَنَّ أُسْبُوعًا وَاحِدًا صَنَعَ فَرْقًا كَبِيرًا. وَإِذَا تَعَاوَنَتِ المَدَارِسُ مَعَ الشَّرِكَاتِ المَحَلِّيَّةِ، فَسَيَدْخُلُ الشَّبَابُ عَالَمَ العَمَلِ بِثِقَةٍ وَاسْتِعْدَادٍ بَدَلًا مِنَ الخَوْفِ وَالحَيْرَةِ.</a:t>
@@ -10487,11 +10568,12 @@
               <a:buNone/>
             </a:pPr>
             <a:r>
-              <a:rPr lang="en-US" sz="950" b="1" dirty="0">
+              <a:rPr lang="ar-SA" sz="950" b="1" dirty="0">
                 <a:solidFill>
                   <a:srgbClr val="FFFFFF"/>
                 </a:solidFill>
                 <a:latin typeface="Calibri" pitchFamily="34" charset="0"/>
+                <a:ea typeface="Amiri" pitchFamily="2" charset="-78"/>
                 <a:cs typeface="Amiri" pitchFamily="2" charset="-78"/>
               </a:rPr>
               <a:t>يُطْلَبُ مِنْهُ فَجْأَةً</a:t>
@@ -10552,11 +10634,12 @@
               <a:buNone/>
             </a:pPr>
             <a:r>
-              <a:rPr lang="en-US" sz="950" b="1" dirty="0">
+              <a:rPr lang="ar-SA" sz="950" b="1" dirty="0">
                 <a:solidFill>
                   <a:srgbClr val="FFFFFF"/>
                 </a:solidFill>
                 <a:latin typeface="Calibri" pitchFamily="34" charset="0"/>
+                <a:ea typeface="Amiri" pitchFamily="2" charset="-78"/>
                 <a:cs typeface="Amiri" pitchFamily="2" charset="-78"/>
               </a:rPr>
               <a:t>لَا غِنَى عَنْهُ</a:t>
@@ -10617,11 +10700,12 @@
               <a:buNone/>
             </a:pPr>
             <a:r>
-              <a:rPr lang="en-US" sz="950" b="1" dirty="0">
+              <a:rPr lang="ar-SA" sz="950" b="1" dirty="0">
                 <a:solidFill>
                   <a:srgbClr val="FFFFFF"/>
                 </a:solidFill>
                 <a:latin typeface="Calibri" pitchFamily="34" charset="0"/>
+                <a:ea typeface="Amiri" pitchFamily="2" charset="-78"/>
                 <a:cs typeface="Amiri" pitchFamily="2" charset="-78"/>
               </a:rPr>
               <a:t>مِمَّا يَجْعَلُ</a:t>
@@ -10682,11 +10766,12 @@
               <a:buNone/>
             </a:pPr>
             <a:r>
-              <a:rPr lang="en-US" sz="950" b="1" dirty="0">
+              <a:rPr lang="ar-SA" sz="950" b="1" dirty="0">
                 <a:solidFill>
                   <a:srgbClr val="FFFFFF"/>
                 </a:solidFill>
                 <a:latin typeface="Calibri" pitchFamily="34" charset="0"/>
+                <a:ea typeface="Amiri" pitchFamily="2" charset="-78"/>
                 <a:cs typeface="Amiri" pitchFamily="2" charset="-78"/>
               </a:rPr>
               <a:t>إِذَا تَعَاوَنَتْ … فَسَيَدْخُلُ</a:t>
@@ -10820,6 +10905,7 @@
                   <a:srgbClr val="D4AF37"/>
                 </a:solidFill>
                 <a:latin typeface="Amiri" pitchFamily="2" charset="-78"/>
+                <a:ea typeface="Amiri" pitchFamily="2" charset="-78"/>
                 <a:cs typeface="Amiri" pitchFamily="2" charset="-78"/>
               </a:rPr>
               <a:t>م</a:t>
@@ -11140,6 +11226,7 @@
                   <a:srgbClr val="8A6D1E"/>
                 </a:solidFill>
                 <a:latin typeface="Amiri" pitchFamily="2" charset="-78"/>
+                <a:ea typeface="Amiri" pitchFamily="2" charset="-78"/>
                 <a:cs typeface="Amiri" pitchFamily="2" charset="-78"/>
               </a:rPr>
               <a:t>قَيِّمْ عَمَلَكَ</a:t>
@@ -12384,6 +12471,7 @@
                   <a:srgbClr val="FFFFFF"/>
                 </a:solidFill>
                 <a:latin typeface="Amiri" pitchFamily="2" charset="-78"/>
+                <a:ea typeface="Amiri" pitchFamily="2" charset="-78"/>
                 <a:cs typeface="Amiri" pitchFamily="2" charset="-78"/>
               </a:rPr>
               <a:t>أَحْسَنْتُمْ! إِلَى اللِّقَاءِ</a:t>
@@ -12536,6 +12624,7 @@
                   <a:srgbClr val="D4AF37"/>
                 </a:solidFill>
                 <a:latin typeface="Amiri" pitchFamily="2" charset="-78"/>
+                <a:ea typeface="Amiri" pitchFamily="2" charset="-78"/>
                 <a:cs typeface="Amiri" pitchFamily="2" charset="-78"/>
               </a:rPr>
               <a:t>وَرْشَةُ التَّدْرِيبِ</a:t>
@@ -12669,6 +12758,7 @@
                   <a:srgbClr val="D4AF37"/>
                 </a:solidFill>
                 <a:latin typeface="Amiri" pitchFamily="2" charset="-78"/>
+                <a:ea typeface="Amiri" pitchFamily="2" charset="-78"/>
                 <a:cs typeface="Amiri" pitchFamily="2" charset="-78"/>
               </a:rPr>
               <a:t>م</a:t>
@@ -12989,6 +13079,7 @@
                   <a:srgbClr val="8A6D1E"/>
                 </a:solidFill>
                 <a:latin typeface="Amiri" pitchFamily="2" charset="-78"/>
+                <a:ea typeface="Amiri" pitchFamily="2" charset="-78"/>
                 <a:cs typeface="Amiri" pitchFamily="2" charset="-78"/>
               </a:rPr>
               <a:t>آدَابُ الصَّفِّ</a:t>
@@ -14520,6 +14611,7 @@
                   <a:srgbClr val="D4AF37"/>
                 </a:solidFill>
                 <a:latin typeface="Amiri" pitchFamily="2" charset="-78"/>
+                <a:ea typeface="Amiri" pitchFamily="2" charset="-78"/>
                 <a:cs typeface="Amiri" pitchFamily="2" charset="-78"/>
               </a:rPr>
               <a:t>م</a:t>
@@ -14840,6 +14932,7 @@
                   <a:srgbClr val="8A6D1E"/>
                 </a:solidFill>
                 <a:latin typeface="Amiri" pitchFamily="2" charset="-78"/>
+                <a:ea typeface="Amiri" pitchFamily="2" charset="-78"/>
                 <a:cs typeface="Amiri" pitchFamily="2" charset="-78"/>
               </a:rPr>
               <a:t>خَرِيطَةُ الوَرْشَةِ</a:t>
@@ -15154,6 +15247,7 @@
                   <a:srgbClr val="1B3B6F"/>
                 </a:solidFill>
                 <a:latin typeface="Amiri" pitchFamily="2" charset="-78"/>
+                <a:ea typeface="Amiri" pitchFamily="2" charset="-78"/>
                 <a:cs typeface="Amiri" pitchFamily="2" charset="-78"/>
               </a:rPr>
               <a:t>كَيْفَ</a:t>
@@ -15430,6 +15524,7 @@
                   <a:srgbClr val="1E6B52"/>
                 </a:solidFill>
                 <a:latin typeface="Amiri" pitchFamily="2" charset="-78"/>
+                <a:ea typeface="Amiri" pitchFamily="2" charset="-78"/>
                 <a:cs typeface="Amiri" pitchFamily="2" charset="-78"/>
               </a:rPr>
               <a:t>الاسْتِمَارَةُ</a:t>
@@ -15706,6 +15801,7 @@
                   <a:srgbClr val="1E6B52"/>
                 </a:solidFill>
                 <a:latin typeface="Amiri" pitchFamily="2" charset="-78"/>
+                <a:ea typeface="Amiri" pitchFamily="2" charset="-78"/>
                 <a:cs typeface="Amiri" pitchFamily="2" charset="-78"/>
               </a:rPr>
               <a:t>الرِّسَالَةُ</a:t>
@@ -15982,6 +16078,7 @@
                   <a:srgbClr val="1E6B52"/>
                 </a:solidFill>
                 <a:latin typeface="Amiri" pitchFamily="2" charset="-78"/>
+                <a:ea typeface="Amiri" pitchFamily="2" charset="-78"/>
                 <a:cs typeface="Amiri" pitchFamily="2" charset="-78"/>
               </a:rPr>
               <a:t>المَقَالُ</a:t>
@@ -16258,6 +16355,7 @@
                   <a:srgbClr val="8A6D1E"/>
                 </a:solidFill>
                 <a:latin typeface="Amiri" pitchFamily="2" charset="-78"/>
+                <a:ea typeface="Amiri" pitchFamily="2" charset="-78"/>
                 <a:cs typeface="Amiri" pitchFamily="2" charset="-78"/>
               </a:rPr>
               <a:t>قَيِّمْ</a:t>
@@ -16501,6 +16599,7 @@
                   <a:srgbClr val="D4AF37"/>
                 </a:solidFill>
                 <a:latin typeface="Amiri" pitchFamily="2" charset="-78"/>
+                <a:ea typeface="Amiri" pitchFamily="2" charset="-78"/>
                 <a:cs typeface="Amiri" pitchFamily="2" charset="-78"/>
               </a:rPr>
               <a:t>م</a:t>
@@ -16821,6 +16920,7 @@
                   <a:srgbClr val="8A6D1E"/>
                 </a:solidFill>
                 <a:latin typeface="Amiri" pitchFamily="2" charset="-78"/>
+                <a:ea typeface="Amiri" pitchFamily="2" charset="-78"/>
                 <a:cs typeface="Amiri" pitchFamily="2" charset="-78"/>
               </a:rPr>
               <a:t>امْتِحَانُ الكِتَابَةِ</a:t>
@@ -17445,6 +17545,7 @@
                   <a:srgbClr val="1B3B6F"/>
                 </a:solidFill>
                 <a:latin typeface="Amiri" pitchFamily="2" charset="-78"/>
+                <a:ea typeface="Amiri" pitchFamily="2" charset="-78"/>
                 <a:cs typeface="Amiri" pitchFamily="2" charset="-78"/>
               </a:rPr>
               <a:t>العَمَلُ مُتْعِبٌ، وَمَعَ ذٰلِكَ أُحِبُّهُ كَثِيرًا</a:t>
@@ -17544,6 +17645,7 @@
                   <a:srgbClr val="1B3B6F"/>
                 </a:solidFill>
                 <a:latin typeface="Amiri" pitchFamily="2" charset="-78"/>
+                <a:ea typeface="Amiri" pitchFamily="2" charset="-78"/>
                 <a:cs typeface="Amiri" pitchFamily="2" charset="-78"/>
               </a:rPr>
               <a:t>كُنْتُ أُحِبُّ العُلُومَ … لِذٰلِكَ أَطْمَحُ إِلَى …</a:t>
@@ -17643,6 +17745,7 @@
                   <a:srgbClr val="1B3B6F"/>
                 </a:solidFill>
                 <a:latin typeface="Amiri" pitchFamily="2" charset="-78"/>
+                <a:ea typeface="Amiri" pitchFamily="2" charset="-78"/>
                 <a:cs typeface="Amiri" pitchFamily="2" charset="-78"/>
               </a:rPr>
               <a:t>إِذَا لَمْ أُقْبَلْ، فَسَأَدْرُسُ الكِيمْيَاءَ أَوَّلًا</a:t>
@@ -17814,6 +17917,7 @@
                   <a:srgbClr val="D4AF37"/>
                 </a:solidFill>
                 <a:latin typeface="Amiri" pitchFamily="2" charset="-78"/>
+                <a:ea typeface="Amiri" pitchFamily="2" charset="-78"/>
                 <a:cs typeface="Amiri" pitchFamily="2" charset="-78"/>
               </a:rPr>
               <a:t>م</a:t>
@@ -18134,6 +18238,7 @@
                   <a:srgbClr val="8A6D1E"/>
                 </a:solidFill>
                 <a:latin typeface="Amiri" pitchFamily="2" charset="-78"/>
+                <a:ea typeface="Amiri" pitchFamily="2" charset="-78"/>
                 <a:cs typeface="Amiri" pitchFamily="2" charset="-78"/>
               </a:rPr>
               <a:t>اسْتِمَارَةُ مَلَفِّ الإِنْجَازِ المِهْنِيِّ</a:t>
@@ -18490,6 +18595,7 @@
                   <a:srgbClr val="1B3B6F"/>
                 </a:solidFill>
                 <a:latin typeface="Amiri" pitchFamily="2" charset="-78"/>
+                <a:ea typeface="Amiri" pitchFamily="2" charset="-78"/>
                 <a:cs typeface="Amiri" pitchFamily="2" charset="-78"/>
               </a:rPr>
               <a:t>الاسْمُ وَالصَّفُّ</a:t>
@@ -18734,6 +18840,7 @@
                   <a:srgbClr val="1B3B6F"/>
                 </a:solidFill>
                 <a:latin typeface="Amiri" pitchFamily="2" charset="-78"/>
+                <a:ea typeface="Amiri" pitchFamily="2" charset="-78"/>
                 <a:cs typeface="Amiri" pitchFamily="2" charset="-78"/>
               </a:rPr>
               <a:t>المَوَادُّ الحَالِيَّةُ</a:t>
@@ -18978,6 +19085,7 @@
                   <a:srgbClr val="1B3B6F"/>
                 </a:solidFill>
                 <a:latin typeface="Amiri" pitchFamily="2" charset="-78"/>
+                <a:ea typeface="Amiri" pitchFamily="2" charset="-78"/>
                 <a:cs typeface="Amiri" pitchFamily="2" charset="-78"/>
               </a:rPr>
               <a:t>الشَّهَادَاتُ</a:t>
@@ -19222,6 +19330,7 @@
                   <a:srgbClr val="1B3B6F"/>
                 </a:solidFill>
                 <a:latin typeface="Amiri" pitchFamily="2" charset="-78"/>
+                <a:ea typeface="Amiri" pitchFamily="2" charset="-78"/>
                 <a:cs typeface="Amiri" pitchFamily="2" charset="-78"/>
               </a:rPr>
               <a:t>خِبْرَةُ العَمَلِ</a:t>
@@ -19466,6 +19575,7 @@
                   <a:srgbClr val="1B3B6F"/>
                 </a:solidFill>
                 <a:latin typeface="Amiri" pitchFamily="2" charset="-78"/>
+                <a:ea typeface="Amiri" pitchFamily="2" charset="-78"/>
                 <a:cs typeface="Amiri" pitchFamily="2" charset="-78"/>
               </a:rPr>
               <a:t>التَّطَوُّعُ</a:t>
@@ -19710,6 +19820,7 @@
                   <a:srgbClr val="1B3B6F"/>
                 </a:solidFill>
                 <a:latin typeface="Amiri" pitchFamily="2" charset="-78"/>
+                <a:ea typeface="Amiri" pitchFamily="2" charset="-78"/>
                 <a:cs typeface="Amiri" pitchFamily="2" charset="-78"/>
               </a:rPr>
               <a:t>المِهْنَةُ المَطْلُوبَةُ</a:t>
@@ -19954,6 +20065,7 @@
                   <a:srgbClr val="1B3B6F"/>
                 </a:solidFill>
                 <a:latin typeface="Amiri" pitchFamily="2" charset="-78"/>
+                <a:ea typeface="Amiri" pitchFamily="2" charset="-78"/>
                 <a:cs typeface="Amiri" pitchFamily="2" charset="-78"/>
               </a:rPr>
               <a:t>الخُطَّةُ البَدِيلَةُ</a:t>
@@ -20133,6 +20245,7 @@
                   <a:srgbClr val="1B3B6F"/>
                 </a:solidFill>
                 <a:latin typeface="Amiri" pitchFamily="2" charset="-78"/>
+                <a:ea typeface="Amiri" pitchFamily="2" charset="-78"/>
                 <a:cs typeface="Amiri" pitchFamily="2" charset="-78"/>
               </a:rPr>
               <a:t>جُمْلَةٌ: كَيْفَ سَاعَدَتْكَ خِبْرَتُكَ؟</a:t>
@@ -20342,6 +20455,7 @@
                   <a:srgbClr val="D4AF37"/>
                 </a:solidFill>
                 <a:latin typeface="Amiri" pitchFamily="2" charset="-78"/>
+                <a:ea typeface="Amiri" pitchFamily="2" charset="-78"/>
                 <a:cs typeface="Amiri" pitchFamily="2" charset="-78"/>
               </a:rPr>
               <a:t>م</a:t>
@@ -20662,6 +20776,7 @@
                   <a:srgbClr val="8A6D1E"/>
                 </a:solidFill>
                 <a:latin typeface="Amiri" pitchFamily="2" charset="-78"/>
+                <a:ea typeface="Amiri" pitchFamily="2" charset="-78"/>
                 <a:cs typeface="Amiri" pitchFamily="2" charset="-78"/>
               </a:rPr>
               <a:t>نَمُوذَجُ الإِجَابَةِ</a:t>
@@ -20980,6 +21095,7 @@
                   <a:srgbClr val="1B3B6F"/>
                 </a:solidFill>
                 <a:latin typeface="Amiri" pitchFamily="2" charset="-78"/>
+                <a:ea typeface="Amiri" pitchFamily="2" charset="-78"/>
                 <a:cs typeface="Amiri" pitchFamily="2" charset="-78"/>
               </a:rPr>
               <a:t>آدَمُ رَشِيدٌ، الثَّانِي عَشَرَ</a:t>
@@ -21018,6 +21134,7 @@
                   <a:srgbClr val="1B3B6F"/>
                 </a:solidFill>
                 <a:latin typeface="Amiri" pitchFamily="2" charset="-78"/>
+                <a:ea typeface="Amiri" pitchFamily="2" charset="-78"/>
                 <a:cs typeface="Amiri" pitchFamily="2" charset="-78"/>
               </a:rPr>
               <a:t>الاسْمُ وَالصَّفُّ</a:t>
@@ -21159,6 +21276,7 @@
                   <a:srgbClr val="1B3B6F"/>
                 </a:solidFill>
                 <a:latin typeface="Amiri" pitchFamily="2" charset="-78"/>
+                <a:ea typeface="Amiri" pitchFamily="2" charset="-78"/>
                 <a:cs typeface="Amiri" pitchFamily="2" charset="-78"/>
               </a:rPr>
               <a:t>الكِيمْيَاءُ وَالأَحْيَاءُ وَالرِّيَاضِيَّاتُ</a:t>
@@ -21197,6 +21315,7 @@
                   <a:srgbClr val="1B3B6F"/>
                 </a:solidFill>
                 <a:latin typeface="Amiri" pitchFamily="2" charset="-78"/>
+                <a:ea typeface="Amiri" pitchFamily="2" charset="-78"/>
                 <a:cs typeface="Amiri" pitchFamily="2" charset="-78"/>
               </a:rPr>
               <a:t>المَوَادُّ الحَالِيَّةُ</a:t>
@@ -21338,6 +21457,7 @@
                   <a:srgbClr val="1B3B6F"/>
                 </a:solidFill>
                 <a:latin typeface="Amiri" pitchFamily="2" charset="-78"/>
+                <a:ea typeface="Amiri" pitchFamily="2" charset="-78"/>
                 <a:cs typeface="Amiri" pitchFamily="2" charset="-78"/>
               </a:rPr>
               <a:t>الإِسْعَافَاتُ الأَوَّلِيَّةُ</a:t>
@@ -21376,6 +21496,7 @@
                   <a:srgbClr val="1B3B6F"/>
                 </a:solidFill>
                 <a:latin typeface="Amiri" pitchFamily="2" charset="-78"/>
+                <a:ea typeface="Amiri" pitchFamily="2" charset="-78"/>
                 <a:cs typeface="Amiri" pitchFamily="2" charset="-78"/>
               </a:rPr>
               <a:t>الشَّهَادَاتُ</a:t>
@@ -21517,6 +21638,7 @@
                   <a:srgbClr val="1B3B6F"/>
                 </a:solidFill>
                 <a:latin typeface="Amiri" pitchFamily="2" charset="-78"/>
+                <a:ea typeface="Amiri" pitchFamily="2" charset="-78"/>
                 <a:cs typeface="Amiri" pitchFamily="2" charset="-78"/>
               </a:rPr>
               <a:t>أُسْبُوعَانِ فِي صَيْدَلِيَّةٍ</a:t>
@@ -21555,6 +21677,7 @@
                   <a:srgbClr val="1B3B6F"/>
                 </a:solidFill>
                 <a:latin typeface="Amiri" pitchFamily="2" charset="-78"/>
+                <a:ea typeface="Amiri" pitchFamily="2" charset="-78"/>
                 <a:cs typeface="Amiri" pitchFamily="2" charset="-78"/>
               </a:rPr>
               <a:t>خِبْرَةُ العَمَلِ</a:t>
@@ -21696,6 +21819,7 @@
                   <a:srgbClr val="1B3B6F"/>
                 </a:solidFill>
                 <a:latin typeface="Amiri" pitchFamily="2" charset="-78"/>
+                <a:ea typeface="Amiri" pitchFamily="2" charset="-78"/>
                 <a:cs typeface="Amiri" pitchFamily="2" charset="-78"/>
               </a:rPr>
               <a:t>دَارُ المُسِنِّينَ</a:t>
@@ -21734,6 +21858,7 @@
                   <a:srgbClr val="1B3B6F"/>
                 </a:solidFill>
                 <a:latin typeface="Amiri" pitchFamily="2" charset="-78"/>
+                <a:ea typeface="Amiri" pitchFamily="2" charset="-78"/>
                 <a:cs typeface="Amiri" pitchFamily="2" charset="-78"/>
               </a:rPr>
               <a:t>التَّطَوُّعُ</a:t>
@@ -21875,6 +22000,7 @@
                   <a:srgbClr val="1B3B6F"/>
                 </a:solidFill>
                 <a:latin typeface="Amiri" pitchFamily="2" charset="-78"/>
+                <a:ea typeface="Amiri" pitchFamily="2" charset="-78"/>
                 <a:cs typeface="Amiri" pitchFamily="2" charset="-78"/>
               </a:rPr>
               <a:t>صَيْدَلَانِيٌّ</a:t>
@@ -21913,6 +22039,7 @@
                   <a:srgbClr val="1B3B6F"/>
                 </a:solidFill>
                 <a:latin typeface="Amiri" pitchFamily="2" charset="-78"/>
+                <a:ea typeface="Amiri" pitchFamily="2" charset="-78"/>
                 <a:cs typeface="Amiri" pitchFamily="2" charset="-78"/>
               </a:rPr>
               <a:t>المِهْنَةُ المَطْلُوبَةُ</a:t>
@@ -22054,6 +22181,7 @@
                   <a:srgbClr val="1B3B6F"/>
                 </a:solidFill>
                 <a:latin typeface="Amiri" pitchFamily="2" charset="-78"/>
+                <a:ea typeface="Amiri" pitchFamily="2" charset="-78"/>
                 <a:cs typeface="Amiri" pitchFamily="2" charset="-78"/>
               </a:rPr>
               <a:t>دِرَاسَةُ الكِيمْيَاءِ أَوَّلًا</a:t>
@@ -22092,6 +22220,7 @@
                   <a:srgbClr val="1B3B6F"/>
                 </a:solidFill>
                 <a:latin typeface="Amiri" pitchFamily="2" charset="-78"/>
+                <a:ea typeface="Amiri" pitchFamily="2" charset="-78"/>
                 <a:cs typeface="Amiri" pitchFamily="2" charset="-78"/>
               </a:rPr>
               <a:t>الخُطَّةُ البَدِيلَةُ</a:t>
@@ -22233,6 +22362,7 @@
                   <a:srgbClr val="1B3B6F"/>
                 </a:solidFill>
                 <a:latin typeface="Amiri" pitchFamily="2" charset="-78"/>
+                <a:ea typeface="Amiri" pitchFamily="2" charset="-78"/>
                 <a:cs typeface="Amiri" pitchFamily="2" charset="-78"/>
               </a:rPr>
               <a:t>كُنْتُ أُفَكِّرُ فِي الطِّبِّ، أَمَّا الآنَ فَأَعْرِفُ أَنَّ الصَّيْدَلَةَ تُنَاسِبُنِي أَكْثَرَ.</a:t>
@@ -22271,6 +22401,7 @@
                   <a:srgbClr val="1B3B6F"/>
                 </a:solidFill>
                 <a:latin typeface="Amiri" pitchFamily="2" charset="-78"/>
+                <a:ea typeface="Amiri" pitchFamily="2" charset="-78"/>
                 <a:cs typeface="Amiri" pitchFamily="2" charset="-78"/>
               </a:rPr>
               <a:t>جُمْلَةٌ: كَيْفَ سَاعَدَتْكَ خِبْرَتُكَ؟</a:t>
@@ -22480,6 +22611,7 @@
                   <a:srgbClr val="D4AF37"/>
                 </a:solidFill>
                 <a:latin typeface="Amiri" pitchFamily="2" charset="-78"/>
+                <a:ea typeface="Amiri" pitchFamily="2" charset="-78"/>
                 <a:cs typeface="Amiri" pitchFamily="2" charset="-78"/>
               </a:rPr>
               <a:t>م</a:t>
@@ -22800,6 +22932,7 @@
                   <a:srgbClr val="8A6D1E"/>
                 </a:solidFill>
                 <a:latin typeface="Amiri" pitchFamily="2" charset="-78"/>
+                <a:ea typeface="Amiri" pitchFamily="2" charset="-78"/>
                 <a:cs typeface="Amiri" pitchFamily="2" charset="-78"/>
               </a:rPr>
               <a:t>أَخْبَارُ صَيْفِي</a:t>
@@ -23275,6 +23408,7 @@
                   <a:srgbClr val="1B3B6F"/>
                 </a:solidFill>
                 <a:latin typeface="Amiri" pitchFamily="2" charset="-78"/>
+                <a:ea typeface="Amiri" pitchFamily="2" charset="-78"/>
                 <a:cs typeface="Amiri" pitchFamily="2" charset="-78"/>
               </a:rPr>
               <a:t>أَوَّلًا، انْتَهَتِ الامْتِحَانَاتُ، وَكَانَتْ …</a:t>
@@ -23351,6 +23485,7 @@
                   <a:srgbClr val="1B3B6F"/>
                 </a:solidFill>
                 <a:latin typeface="Amiri" pitchFamily="2" charset="-78"/>
+                <a:ea typeface="Amiri" pitchFamily="2" charset="-78"/>
                 <a:cs typeface="Amiri" pitchFamily="2" charset="-78"/>
               </a:rPr>
               <a:t>ثُمَّ بَدَأْتُ تَدْرِيبًا فِي …</a:t>
@@ -23427,6 +23562,7 @@
                   <a:srgbClr val="1B3B6F"/>
                 </a:solidFill>
                 <a:latin typeface="Amiri" pitchFamily="2" charset="-78"/>
+                <a:ea typeface="Amiri" pitchFamily="2" charset="-78"/>
                 <a:cs typeface="Amiri" pitchFamily="2" charset="-78"/>
               </a:rPr>
               <a:t>العَمَلُ مُتْعِبٌ، وَمَعَ ذٰلِكَ …</a:t>
@@ -23503,6 +23639,7 @@
                   <a:srgbClr val="1B3B6F"/>
                 </a:solidFill>
                 <a:latin typeface="Amiri" pitchFamily="2" charset="-78"/>
+                <a:ea typeface="Amiri" pitchFamily="2" charset="-78"/>
                 <a:cs typeface="Amiri" pitchFamily="2" charset="-78"/>
               </a:rPr>
               <a:t>لِذٰلِكَ سَأَدْرُسُ … وَإِذَا لَمْ …</a:t>
@@ -23674,6 +23811,7 @@
                   <a:srgbClr val="D4AF37"/>
                 </a:solidFill>
                 <a:latin typeface="Amiri" pitchFamily="2" charset="-78"/>
+                <a:ea typeface="Amiri" pitchFamily="2" charset="-78"/>
                 <a:cs typeface="Amiri" pitchFamily="2" charset="-78"/>
               </a:rPr>
               <a:t>م</a:t>
@@ -23994,6 +24132,7 @@
                   <a:srgbClr val="8A6D1E"/>
                 </a:solidFill>
                 <a:latin typeface="Amiri" pitchFamily="2" charset="-78"/>
+                <a:ea typeface="Amiri" pitchFamily="2" charset="-78"/>
                 <a:cs typeface="Amiri" pitchFamily="2" charset="-78"/>
               </a:rPr>
               <a:t>نَصُّ السُّؤَالِ</a:t>
@@ -24274,6 +24413,7 @@
                   <a:srgbClr val="1B3B6F"/>
                 </a:solidFill>
                 <a:latin typeface="Amiri" pitchFamily="2" charset="-78"/>
+                <a:ea typeface="Amiri" pitchFamily="2" charset="-78"/>
                 <a:cs typeface="Amiri" pitchFamily="2" charset="-78"/>
               </a:rPr>
               <a:t>اكْتُبْ رِسَالَةً إِلَى صَدِيقِكَ عَنْ صَيْفِكَ (٨٠–٩٠ كَلِمَةً).</a:t>
@@ -24415,6 +24555,7 @@
                   <a:srgbClr val="1B3B6F"/>
                 </a:solidFill>
                 <a:latin typeface="Amiri" pitchFamily="2" charset="-78"/>
+                <a:ea typeface="Amiri" pitchFamily="2" charset="-78"/>
                 <a:cs typeface="Amiri" pitchFamily="2" charset="-78"/>
               </a:rPr>
               <a:t>كَيْفَ كَانَتِ امْتِحَانَاتُكَ؟</a:t>
@@ -24556,6 +24697,7 @@
                   <a:srgbClr val="1B3B6F"/>
                 </a:solidFill>
                 <a:latin typeface="Amiri" pitchFamily="2" charset="-78"/>
+                <a:ea typeface="Amiri" pitchFamily="2" charset="-78"/>
                 <a:cs typeface="Amiri" pitchFamily="2" charset="-78"/>
               </a:rPr>
               <a:t>مَا التَّدْرِيبُ أَوِ العَمَلُ الَّذِي بَدَأْتَهُ؟ وَمَاذَا تَفْعَلُ؟</a:t>
@@ -24697,6 +24839,7 @@
                   <a:srgbClr val="1B3B6F"/>
                 </a:solidFill>
                 <a:latin typeface="Amiri" pitchFamily="2" charset="-78"/>
+                <a:ea typeface="Amiri" pitchFamily="2" charset="-78"/>
                 <a:cs typeface="Amiri" pitchFamily="2" charset="-78"/>
               </a:rPr>
               <a:t>مَا رَأْيُكَ فِيهِ؟</a:t>
@@ -24838,6 +24981,7 @@
                   <a:srgbClr val="1B3B6F"/>
                 </a:solidFill>
                 <a:latin typeface="Amiri" pitchFamily="2" charset="-78"/>
+                <a:ea typeface="Amiri" pitchFamily="2" charset="-78"/>
                 <a:cs typeface="Amiri" pitchFamily="2" charset="-78"/>
               </a:rPr>
               <a:t>مَا خِطَطُكَ لِلسَّنَةِ القَادِمَةِ؟ وَاسْأَلْ صَدِيقَكَ سُؤَالًا.</a:t>
@@ -25047,6 +25191,7 @@
                   <a:srgbClr val="D4AF37"/>
                 </a:solidFill>
                 <a:latin typeface="Amiri" pitchFamily="2" charset="-78"/>
+                <a:ea typeface="Amiri" pitchFamily="2" charset="-78"/>
                 <a:cs typeface="Amiri" pitchFamily="2" charset="-78"/>
               </a:rPr>
               <a:t>م</a:t>
@@ -25367,6 +25512,7 @@
                   <a:srgbClr val="8A6D1E"/>
                 </a:solidFill>
                 <a:latin typeface="Amiri" pitchFamily="2" charset="-78"/>
+                <a:ea typeface="Amiri" pitchFamily="2" charset="-78"/>
                 <a:cs typeface="Amiri" pitchFamily="2" charset="-78"/>
               </a:rPr>
               <a:t>قَوَالِبُ الكِتَابَةِ</a:t>
@@ -25647,6 +25793,7 @@
                   <a:srgbClr val="1B3B6F"/>
                 </a:solidFill>
                 <a:latin typeface="Amiri" pitchFamily="2" charset="-78"/>
+                <a:ea typeface="Amiri" pitchFamily="2" charset="-78"/>
                 <a:cs typeface="Amiri" pitchFamily="2" charset="-78"/>
               </a:rPr>
               <a:t>مَرْحَبًا يَا ______ ، كَيْفَ حَالُكَ؟</a:t>
@@ -25853,6 +26000,7 @@
                   <a:srgbClr val="1B3B6F"/>
                 </a:solidFill>
                 <a:latin typeface="Amiri" pitchFamily="2" charset="-78"/>
+                <a:ea typeface="Amiri" pitchFamily="2" charset="-78"/>
                 <a:cs typeface="Amiri" pitchFamily="2" charset="-78"/>
               </a:rPr>
               <a:t>أَوَّلًا، انْتَهَتِ الامْتِحَانَاتُ، وَكَانَتْ ______ أَصْعَبَ مَادَّةٍ.</a:t>
@@ -26059,6 +26207,7 @@
                   <a:srgbClr val="1B3B6F"/>
                 </a:solidFill>
                 <a:latin typeface="Amiri" pitchFamily="2" charset="-78"/>
+                <a:ea typeface="Amiri" pitchFamily="2" charset="-78"/>
                 <a:cs typeface="Amiri" pitchFamily="2" charset="-78"/>
               </a:rPr>
               <a:t>ثُمَّ بَدَأْتُ تَدْرِيبًا فِي ______ ، وَأُسَاعِدُ ______ .</a:t>
@@ -26265,6 +26414,7 @@
                   <a:srgbClr val="1B3B6F"/>
                 </a:solidFill>
                 <a:latin typeface="Amiri" pitchFamily="2" charset="-78"/>
+                <a:ea typeface="Amiri" pitchFamily="2" charset="-78"/>
                 <a:cs typeface="Amiri" pitchFamily="2" charset="-78"/>
               </a:rPr>
               <a:t>العَمَلُ ______ ، وَمَعَ ذٰلِكَ ______ .</a:t>
@@ -26471,6 +26621,7 @@
                   <a:srgbClr val="1B3B6F"/>
                 </a:solidFill>
                 <a:latin typeface="Amiri" pitchFamily="2" charset="-78"/>
+                <a:ea typeface="Amiri" pitchFamily="2" charset="-78"/>
                 <a:cs typeface="Amiri" pitchFamily="2" charset="-78"/>
               </a:rPr>
               <a:t>لِذٰلِكَ سَأَدْرُسُ ______ . وَأَنْتَ، ______ ؟</a:t>
@@ -26677,6 +26828,7 @@
                   <a:srgbClr val="1B3B6F"/>
                 </a:solidFill>
                 <a:latin typeface="Amiri" pitchFamily="2" charset="-78"/>
+                <a:ea typeface="Amiri" pitchFamily="2" charset="-78"/>
                 <a:cs typeface="Amiri" pitchFamily="2" charset="-78"/>
               </a:rPr>
               <a:t>إِلَى اللِّقَاءِ، ______</a:t>
@@ -26916,13 +27068,9 @@
     <a:fontScheme name="Office">
       <a:majorFont>
         <a:latin typeface="Calibri Light" panose="020F0302020204030204"/>
-        <a:ea typeface=""/>
-        <a:cs typeface=""/>
-        <a:font script="Jpan" typeface="游ゴシック Light"/>
-        <a:font script="Hang" typeface="맑은 고딕"/>
-        <a:font script="Hans" typeface="等线 Light"/>
-        <a:font script="Hant" typeface="新細明體"/>
-        <a:font script="Arab" typeface="Times New Roman"/>
+        <a:ea typeface="Amiri" pitchFamily="2" charset="-78"/>
+        <a:cs typeface="Amiri" pitchFamily="2" charset="-78"/>
+        <a:font script="Arab" typeface="Amiri"/>
         <a:font script="Hebr" typeface="Times New Roman"/>
         <a:font script="Thai" typeface="Angsana New"/>
         <a:font script="Ethi" typeface="Nyala"/>
@@ -26968,13 +27116,9 @@
       </a:majorFont>
       <a:minorFont>
         <a:latin typeface="Calibri" panose="020F0502020204030204"/>
-        <a:ea typeface=""/>
-        <a:cs typeface=""/>
-        <a:font script="Jpan" typeface="游ゴシック"/>
-        <a:font script="Hang" typeface="맑은 고딕"/>
-        <a:font script="Hans" typeface="等线"/>
-        <a:font script="Hant" typeface="新細明體"/>
-        <a:font script="Arab" typeface="Arial"/>
+        <a:ea typeface="Amiri" pitchFamily="2" charset="-78"/>
+        <a:cs typeface="Amiri" pitchFamily="2" charset="-78"/>
+        <a:font script="Arab" typeface="Amiri"/>
         <a:font script="Hebr" typeface="Arial"/>
         <a:font script="Thai" typeface="Cordia New"/>
         <a:font script="Ethi" typeface="Nyala"/>

--- a/Topic_D/Exam_Practice/TD-L11_Writing_Workshop_Topic_D_Integrated_Communication_Workshop.pptx
+++ b/Topic_D/Exam_Practice/TD-L11_Writing_Workshop_Topic_D_Integrated_Communication_Workshop.pptx
@@ -3848,7 +3848,7 @@
                 <a:solidFill>
                   <a:srgbClr val="FFFFFF"/>
                 </a:solidFill>
-                <a:latin typeface="Calibri" pitchFamily="34" charset="0"/>
+                <a:latin typeface="Amiri" pitchFamily="2" charset="-78"/>
                 <a:ea typeface="Amiri" pitchFamily="2" charset="-78"/>
                 <a:cs typeface="Amiri" pitchFamily="2" charset="-78"/>
               </a:rPr>
@@ -3914,7 +3914,7 @@
                 <a:solidFill>
                   <a:srgbClr val="FFFFFF"/>
                 </a:solidFill>
-                <a:latin typeface="Calibri" pitchFamily="34" charset="0"/>
+                <a:latin typeface="Amiri" pitchFamily="2" charset="-78"/>
                 <a:ea typeface="Amiri" pitchFamily="2" charset="-78"/>
                 <a:cs typeface="Amiri" pitchFamily="2" charset="-78"/>
               </a:rPr>
@@ -3980,7 +3980,7 @@
                 <a:solidFill>
                   <a:srgbClr val="FFFFFF"/>
                 </a:solidFill>
-                <a:latin typeface="Calibri" pitchFamily="34" charset="0"/>
+                <a:latin typeface="Amiri" pitchFamily="2" charset="-78"/>
                 <a:ea typeface="Amiri" pitchFamily="2" charset="-78"/>
                 <a:cs typeface="Amiri" pitchFamily="2" charset="-78"/>
               </a:rPr>
@@ -4046,7 +4046,7 @@
                 <a:solidFill>
                   <a:srgbClr val="FFFFFF"/>
                 </a:solidFill>
-                <a:latin typeface="Calibri" pitchFamily="34" charset="0"/>
+                <a:latin typeface="Amiri" pitchFamily="2" charset="-78"/>
                 <a:ea typeface="Amiri" pitchFamily="2" charset="-78"/>
                 <a:cs typeface="Amiri" pitchFamily="2" charset="-78"/>
               </a:rPr>
@@ -4844,7 +4844,7 @@
                 <a:solidFill>
                   <a:srgbClr val="FFFFFF"/>
                 </a:solidFill>
-                <a:latin typeface="Calibri" pitchFamily="34" charset="0"/>
+                <a:latin typeface="Amiri" pitchFamily="2" charset="-78"/>
                 <a:ea typeface="Amiri" pitchFamily="2" charset="-78"/>
                 <a:cs typeface="Amiri" pitchFamily="2" charset="-78"/>
               </a:rPr>
@@ -4910,7 +4910,7 @@
                 <a:solidFill>
                   <a:srgbClr val="FFFFFF"/>
                 </a:solidFill>
-                <a:latin typeface="Calibri" pitchFamily="34" charset="0"/>
+                <a:latin typeface="Amiri" pitchFamily="2" charset="-78"/>
                 <a:ea typeface="Amiri" pitchFamily="2" charset="-78"/>
                 <a:cs typeface="Amiri" pitchFamily="2" charset="-78"/>
               </a:rPr>
@@ -4976,7 +4976,7 @@
                 <a:solidFill>
                   <a:srgbClr val="FFFFFF"/>
                 </a:solidFill>
-                <a:latin typeface="Calibri" pitchFamily="34" charset="0"/>
+                <a:latin typeface="Amiri" pitchFamily="2" charset="-78"/>
                 <a:ea typeface="Amiri" pitchFamily="2" charset="-78"/>
                 <a:cs typeface="Amiri" pitchFamily="2" charset="-78"/>
               </a:rPr>
@@ -5042,7 +5042,7 @@
                 <a:solidFill>
                   <a:srgbClr val="FFFFFF"/>
                 </a:solidFill>
-                <a:latin typeface="Calibri" pitchFamily="34" charset="0"/>
+                <a:latin typeface="Amiri" pitchFamily="2" charset="-78"/>
                 <a:ea typeface="Amiri" pitchFamily="2" charset="-78"/>
                 <a:cs typeface="Amiri" pitchFamily="2" charset="-78"/>
               </a:rPr>
@@ -8602,7 +8602,7 @@
                 <a:solidFill>
                   <a:srgbClr val="FFFFFF"/>
                 </a:solidFill>
-                <a:latin typeface="Calibri" pitchFamily="34" charset="0"/>
+                <a:latin typeface="Amiri" pitchFamily="2" charset="-78"/>
                 <a:ea typeface="Amiri" pitchFamily="2" charset="-78"/>
                 <a:cs typeface="Amiri" pitchFamily="2" charset="-78"/>
               </a:rPr>
@@ -8668,7 +8668,7 @@
                 <a:solidFill>
                   <a:srgbClr val="FFFFFF"/>
                 </a:solidFill>
-                <a:latin typeface="Calibri" pitchFamily="34" charset="0"/>
+                <a:latin typeface="Amiri" pitchFamily="2" charset="-78"/>
                 <a:ea typeface="Amiri" pitchFamily="2" charset="-78"/>
                 <a:cs typeface="Amiri" pitchFamily="2" charset="-78"/>
               </a:rPr>
@@ -8734,7 +8734,7 @@
                 <a:solidFill>
                   <a:srgbClr val="FFFFFF"/>
                 </a:solidFill>
-                <a:latin typeface="Calibri" pitchFamily="34" charset="0"/>
+                <a:latin typeface="Amiri" pitchFamily="2" charset="-78"/>
                 <a:ea typeface="Amiri" pitchFamily="2" charset="-78"/>
                 <a:cs typeface="Amiri" pitchFamily="2" charset="-78"/>
               </a:rPr>
@@ -8800,7 +8800,7 @@
                 <a:solidFill>
                   <a:srgbClr val="FFFFFF"/>
                 </a:solidFill>
-                <a:latin typeface="Calibri" pitchFamily="34" charset="0"/>
+                <a:latin typeface="Amiri" pitchFamily="2" charset="-78"/>
                 <a:ea typeface="Amiri" pitchFamily="2" charset="-78"/>
                 <a:cs typeface="Amiri" pitchFamily="2" charset="-78"/>
               </a:rPr>
@@ -9587,7 +9587,7 @@
                 <a:solidFill>
                   <a:srgbClr val="FFFFFF"/>
                 </a:solidFill>
-                <a:latin typeface="Calibri" pitchFamily="34" charset="0"/>
+                <a:latin typeface="Amiri" pitchFamily="2" charset="-78"/>
                 <a:ea typeface="Amiri" pitchFamily="2" charset="-78"/>
                 <a:cs typeface="Amiri" pitchFamily="2" charset="-78"/>
               </a:rPr>
@@ -9653,7 +9653,7 @@
                 <a:solidFill>
                   <a:srgbClr val="FFFFFF"/>
                 </a:solidFill>
-                <a:latin typeface="Calibri" pitchFamily="34" charset="0"/>
+                <a:latin typeface="Amiri" pitchFamily="2" charset="-78"/>
                 <a:ea typeface="Amiri" pitchFamily="2" charset="-78"/>
                 <a:cs typeface="Amiri" pitchFamily="2" charset="-78"/>
               </a:rPr>
@@ -9719,7 +9719,7 @@
                 <a:solidFill>
                   <a:srgbClr val="FFFFFF"/>
                 </a:solidFill>
-                <a:latin typeface="Calibri" pitchFamily="34" charset="0"/>
+                <a:latin typeface="Amiri" pitchFamily="2" charset="-78"/>
                 <a:ea typeface="Amiri" pitchFamily="2" charset="-78"/>
                 <a:cs typeface="Amiri" pitchFamily="2" charset="-78"/>
               </a:rPr>
@@ -9785,7 +9785,7 @@
                 <a:solidFill>
                   <a:srgbClr val="FFFFFF"/>
                 </a:solidFill>
-                <a:latin typeface="Calibri" pitchFamily="34" charset="0"/>
+                <a:latin typeface="Amiri" pitchFamily="2" charset="-78"/>
                 <a:ea typeface="Amiri" pitchFamily="2" charset="-78"/>
                 <a:cs typeface="Amiri" pitchFamily="2" charset="-78"/>
               </a:rPr>
@@ -10572,7 +10572,7 @@
                 <a:solidFill>
                   <a:srgbClr val="FFFFFF"/>
                 </a:solidFill>
-                <a:latin typeface="Calibri" pitchFamily="34" charset="0"/>
+                <a:latin typeface="Amiri" pitchFamily="2" charset="-78"/>
                 <a:ea typeface="Amiri" pitchFamily="2" charset="-78"/>
                 <a:cs typeface="Amiri" pitchFamily="2" charset="-78"/>
               </a:rPr>
@@ -10638,7 +10638,7 @@
                 <a:solidFill>
                   <a:srgbClr val="FFFFFF"/>
                 </a:solidFill>
-                <a:latin typeface="Calibri" pitchFamily="34" charset="0"/>
+                <a:latin typeface="Amiri" pitchFamily="2" charset="-78"/>
                 <a:ea typeface="Amiri" pitchFamily="2" charset="-78"/>
                 <a:cs typeface="Amiri" pitchFamily="2" charset="-78"/>
               </a:rPr>
@@ -10704,7 +10704,7 @@
                 <a:solidFill>
                   <a:srgbClr val="FFFFFF"/>
                 </a:solidFill>
-                <a:latin typeface="Calibri" pitchFamily="34" charset="0"/>
+                <a:latin typeface="Amiri" pitchFamily="2" charset="-78"/>
                 <a:ea typeface="Amiri" pitchFamily="2" charset="-78"/>
                 <a:cs typeface="Amiri" pitchFamily="2" charset="-78"/>
               </a:rPr>
@@ -10770,7 +10770,7 @@
                 <a:solidFill>
                   <a:srgbClr val="FFFFFF"/>
                 </a:solidFill>
-                <a:latin typeface="Calibri" pitchFamily="34" charset="0"/>
+                <a:latin typeface="Amiri" pitchFamily="2" charset="-78"/>
                 <a:ea typeface="Amiri" pitchFamily="2" charset="-78"/>
                 <a:cs typeface="Amiri" pitchFamily="2" charset="-78"/>
               </a:rPr>
